--- a/dist/weeks-대학원/컨셉트와프로세스_02주차_프로세스의계보.pptx
+++ b/dist/weeks-대학원/컨셉트와프로세스_02주차_프로세스의계보.pptx
@@ -7792,7 +7792,7 @@
                 <a:ea typeface="Pretendard SemiBold" pitchFamily="34" charset="-122"/>
                 <a:cs typeface="Pretendard SemiBold" pitchFamily="34" charset="-120"/>
               </a:rPr>
-              <a:t>운영이 바뀌었습니다 — 여덟 번</a:t>
+              <a:t>학기 운영 — 여덟 번</a:t>
             </a:r>
             <a:endParaRPr lang="en-US" sz="3000" dirty="0"/>
           </a:p>

--- a/dist/weeks-대학원/컨셉트와프로세스_02주차_프로세스의계보.pptx
+++ b/dist/weeks-대학원/컨셉트와프로세스_02주차_프로세스의계보.pptx
@@ -18,9 +18,10 @@
     <p:sldId id="266" r:id="rId12"/>
     <p:sldId id="267" r:id="rId13"/>
     <p:sldId id="268" r:id="rId14"/>
+    <p:sldId id="269" r:id="rId15"/>
   </p:sldIdLst>
   <p:notesMasterIdLst>
-    <p:notesMasterId r:id="rId15"/>
+    <p:notesMasterId r:id="rId16"/>
   </p:notesMasterIdLst>
   <p:sldSz cx="12192000" cy="6858000"/>
   <p:notesSz cx="6858000" cy="12192000"/>
@@ -896,13 +897,20 @@
             <a:r>
               <a:rPr lang="en-US" dirty="0"/>
               <a:t>[말할 내용]
-정리하겠습니다.
-과제 세 가지입니다. 리딩 노트 2회차, 계보도 개인본, 그리고 다음 발제자는 발제문 공유.
-계보도 개인본은 어렵지 않습니다. 오늘 함께 그린 그림 위에 자기 연구가 어디 서 있는지 선 하나 긋고 이유 한 줄 쓰시면 됩니다. 잘 그릴 필요 없습니다. 어디에 서 있는지를 정하는 게 목적입니다.
-다음은 Wicked Problems 입니다. Rittel 과 Webber 가 1973년에 쓴 글인데, 오늘 본 방법론 운동이 왜 무너졌는지를 가장 정확하게 설명한 글이기도 합니다. 오늘 이야기의 뒷면이라고 보시면 됩니다.
-다음 회차는 2주 뒤입니다. 격주라 간격이 있으니 리딩 노트를 미루지 마시고 이번 주 안에 써 두세요.
+과제를 구체적으로 말씀드리겠습니다.
+읽을 것은 두 편입니다.
+하나는 리텔과 웨버가 1973년에 쓴 「계획의 일반이론에서의 딜레마」입니다. Policy Sciences 4권 2호, 155쪽부터 169쪽. 열다섯 쪽입니다. 이게 필수예요.
+다른 하나는 뷰캐넌이 1992년에 쓴 「디자인 씽킹에서의 난제」입니다. Design Issues 8권 2호, 5쪽부터 21쪽. 앞의 글을 디자인 쪽으로 옮겨 온 논문이에요. 둘 다 못 읽으시면 앞의 것만 읽고 오세요. 뒤의 것은 세션에서 함께 보겠습니다.
+둘 다 도서관 전자저널에서 받으실 수 있습니다. 접근이 안 되는 분은 오늘 수업 끝나고 알려 주세요.
+쓸 것은 A4 한 장입니다. 네 칸을 채우시면 됩니다.
+첫째, 저자가 무엇에 반대하고 있는가. 한 문단.
+둘째, 내가 동의하지 않는 지점. 한 문단이요. 이게 없으면 그냥 읽은 겁니다.
+셋째, 이 텍스트가 내 연구에 무엇을 요구하는가. 방법을 바꾸라는 건지, 개념을 다시 정의하라는 건지, 내 연구의 위치를 옮기라는 건지. 셋 중 어디인지 밝혀 주세요.
+넷째, 세션에 가져올 질문 하나.
+네 칸이 채워지면 A4 한 장이 됩니다. 요약은 받지 않습니다.
+제출은 공유 폴더에 올려 주시고, 파일 이름은 이름 밑줄 리딩노트02 로 해 주세요.
 [운영 메모]
-격주로 바뀐 뒤 첫 과제다. 2주가 있으니 미루다가 전날 쓰는 패턴이 굳는다. '이번 주 안에'를 반드시 말할 것.</a:t>
+리딩팩 배포 경로가 1회차부터 미정이다. 도서관 전자저널 접근 범위를 확인해 오늘 안에 정할 것. 제출 폴더도 오늘 링크를 공유해야 과제가 굴러간다. 3회차 날짜가 정해지면 '48시간 전'이 언제인지 칠판이나 채팅에 적어 둘 것.</a:t>
             </a:r>
             <a:endParaRPr lang="en-US" dirty="0"/>
           </a:p>
@@ -926,6 +934,104 @@
             <a:fld id="{F7021451-1387-4CA6-816F-3879F97B5CBC}" type="slidenum">
               <a:rPr lang="en-US"/>
               <a:t>13</a:t>
+            </a:fld>
+            <a:endParaRPr lang="en-US"/>
+          </a:p>
+        </p:txBody>
+      </p:sp>
+    </p:spTree>
+    <p:extLst>
+      <p:ext uri="{BB962C8B-B14F-4D97-AF65-F5344CB8AC3E}">
+        <p14:creationId xmlns:p14="http://schemas.microsoft.com/office/powerpoint/2010/main" val="1024086991"/>
+      </p:ext>
+    </p:extLst>
+  </p:cSld>
+  <p:clrMapOvr>
+    <a:masterClrMapping/>
+  </p:clrMapOvr>
+</p:notes>
+</file>
+
+<file path=ppt/notesSlides/notesSlide14.xml><?xml version="1.0" encoding="utf-8"?>
+<p:notes xmlns:a="http://schemas.openxmlformats.org/drawingml/2006/main" xmlns:r="http://schemas.openxmlformats.org/officeDocument/2006/relationships" xmlns:p="http://schemas.openxmlformats.org/presentationml/2006/main">
+  <p:cSld>
+    <p:spTree>
+      <p:nvGrpSpPr>
+        <p:cNvPr id="1" name=""/>
+        <p:cNvGrpSpPr/>
+        <p:nvPr/>
+      </p:nvGrpSpPr>
+      <p:grpSpPr>
+        <a:xfrm>
+          <a:off x="0" y="0"/>
+          <a:ext cx="0" cy="0"/>
+          <a:chOff x="0" y="0"/>
+          <a:chExt cx="0" cy="0"/>
+        </a:xfrm>
+      </p:grpSpPr>
+      <p:sp>
+        <p:nvSpPr>
+          <p:cNvPr id="2" name="Slide Image Placeholder 1"/>
+          <p:cNvSpPr>
+            <a:spLocks noGrp="1" noRot="1" noChangeAspect="1"/>
+          </p:cNvSpPr>
+          <p:nvPr>
+            <p:ph type="sldImg"/>
+          </p:nvPr>
+        </p:nvSpPr>
+        <p:spPr/>
+      </p:sp>
+      <p:sp>
+        <p:nvSpPr>
+          <p:cNvPr id="3" name="Notes Placeholder 2"/>
+          <p:cNvSpPr>
+            <a:spLocks noGrp="1"/>
+          </p:cNvSpPr>
+          <p:nvPr>
+            <p:ph type="body" idx="1"/>
+          </p:nvPr>
+        </p:nvSpPr>
+        <p:spPr/>
+        <p:txBody>
+          <a:bodyPr/>
+          <a:lstStyle/>
+          <a:p>
+            <a:r>
+              <a:rPr lang="en-US" dirty="0"/>
+              <a:t>[말할 내용]
+정리하겠습니다.
+과제 세 가지입니다. 리딩 노트 2회차, 계보도 개인본, 그리고 다음 발제자는 발제문.
+리딩 노트는 방금 보신 네 칸입니다. 읽을 것 두 편, 쓸 것 A4 한 장. 공유 폴더에 올려 주세요.
+계보도 개인본은 어렵지 않습니다. 오늘 함께 그린 판을 내려받아서 자기 연구 자리에 점 찍고 이유 한 줄 쓰시면 됩니다. 잘 그릴 필요 없습니다. 어디에 서 있는지를 정하는 게 목적입니다. 이미지든 PDF 든 한 장이면 돼요.
+발제자는 세션 48시간 전까지 올려 주셔야 합니다. 다른 분들이 읽고 와야 토론이 되니까요.
+다음 회차 날짜를 지금 정하겠습니다. 정해지면 48시간 전이 언제인지도 같이 적어 두세요.
+다음은 Wicked Problems 입니다. 오늘 본 방법론 운동이 왜 무너졌는지를 가장 정확하게 설명한 글이기도 합니다. 오늘 이야기의 뒷면이라고 보시면 됩니다.
+2주 간격이라 미루기 쉽습니다. 이번 주 안에 읽고 써 두세요.
+[운영 메모]
+격주로 바뀐 뒤 첫 과제다. 2주가 있으니 미루다가 전날 쓰는 패턴이 굳는다. '이번 주 안에'를 반드시 말할 것. 세 가지가 오늘 안에 정해져야 과제가 굴러간다 — 3회차 날짜, 제출 폴더 링크, 리딩 입수 경로.</a:t>
+            </a:r>
+            <a:endParaRPr lang="en-US" dirty="0"/>
+          </a:p>
+        </p:txBody>
+      </p:sp>
+      <p:sp>
+        <p:nvSpPr>
+          <p:cNvPr id="4" name="Slide Number Placeholder 3"/>
+          <p:cNvSpPr>
+            <a:spLocks noGrp="1"/>
+          </p:cNvSpPr>
+          <p:nvPr>
+            <p:ph type="sldNum" sz="quarter" idx="10"/>
+          </p:nvPr>
+        </p:nvSpPr>
+        <p:spPr/>
+        <p:txBody>
+          <a:bodyPr/>
+          <a:lstStyle/>
+          <a:p>
+            <a:fld id="{F7021451-1387-4CA6-816F-3879F97B5CBC}" type="slidenum">
+              <a:rPr lang="en-US"/>
+              <a:t>14</a:t>
             </a:fld>
             <a:endParaRPr lang="en-US"/>
           </a:p>
@@ -6391,7 +6497,7 @@
                 <a:ea typeface="Pretendard" pitchFamily="34" charset="-122"/>
                 <a:cs typeface="Pretendard" pitchFamily="34" charset="-120"/>
               </a:rPr>
-              <a:t>HOMEWORK</a:t>
+              <a:t>ASSIGNMENT</a:t>
             </a:r>
             <a:endParaRPr lang="en-US" sz="950" dirty="0"/>
           </a:p>
@@ -6430,7 +6536,7 @@
                 <a:ea typeface="Pretendard SemiBold" pitchFamily="34" charset="-122"/>
                 <a:cs typeface="Pretendard SemiBold" pitchFamily="34" charset="-120"/>
               </a:rPr>
-              <a:t>과제와 다음 주</a:t>
+              <a:t>이번 과제 — 읽을 것과 쓸 것</a:t>
             </a:r>
             <a:endParaRPr lang="en-US" sz="3000" dirty="0"/>
           </a:p>
@@ -6469,7 +6575,7 @@
                 <a:ea typeface="Pretendard" pitchFamily="34" charset="-122"/>
                 <a:cs typeface="Pretendard" pitchFamily="34" charset="-120"/>
               </a:rPr>
-              <a:t>3회차는 Wicked Problems 를 읽습니다.</a:t>
+              <a:t>무엇을 읽고 무엇을 써 오는지 여기서 확정합니다.</a:t>
             </a:r>
             <a:endParaRPr lang="en-US" sz="1150" dirty="0"/>
           </a:p>
@@ -6483,8 +6589,8 @@
         </p:nvSpPr>
         <p:spPr>
           <a:xfrm>
-            <a:off x="640080" y="1719072"/>
-            <a:ext cx="6309360" cy="896112"/>
+            <a:off x="640080" y="1664208"/>
+            <a:ext cx="5254600" cy="3749040"/>
           </a:xfrm>
           <a:prstGeom prst="rect">
             <a:avLst/>
@@ -6502,16 +6608,55 @@
       </p:sp>
       <p:sp>
         <p:nvSpPr>
-          <p:cNvPr id="10" name="Shape 8"/>
-          <p:cNvSpPr/>
-          <p:nvPr/>
-        </p:nvSpPr>
-        <p:spPr>
-          <a:xfrm>
-            <a:off x="969264" y="1993392"/>
-            <a:ext cx="329184" cy="329184"/>
-          </a:xfrm>
-          <a:prstGeom prst="ellipse">
+          <p:cNvPr id="10" name="Text 8"/>
+          <p:cNvSpPr/>
+          <p:nvPr/>
+        </p:nvSpPr>
+        <p:spPr>
+          <a:xfrm>
+            <a:off x="1060704" y="1993392"/>
+            <a:ext cx="4413352" cy="365760"/>
+          </a:xfrm>
+          <a:prstGeom prst="rect">
+            <a:avLst/>
+          </a:prstGeom>
+          <a:noFill/>
+          <a:ln/>
+        </p:spPr>
+        <p:txBody>
+          <a:bodyPr wrap="square" lIns="0" tIns="0" rIns="0" bIns="0" rtlCol="0" anchor="ctr"/>
+          <a:lstStyle/>
+          <a:p>
+            <a:pPr indent="0" marL="0">
+              <a:buNone/>
+            </a:pPr>
+            <a:r>
+              <a:rPr lang="en-US" sz="1700" dirty="0">
+                <a:solidFill>
+                  <a:srgbClr val="111111"/>
+                </a:solidFill>
+                <a:latin typeface="Pretendard SemiBold" pitchFamily="34" charset="0"/>
+                <a:ea typeface="Pretendard SemiBold" pitchFamily="34" charset="-122"/>
+                <a:cs typeface="Pretendard SemiBold" pitchFamily="34" charset="-120"/>
+              </a:rPr>
+              <a:t>읽을 것</a:t>
+            </a:r>
+            <a:endParaRPr lang="en-US" sz="1700" dirty="0"/>
+          </a:p>
+        </p:txBody>
+      </p:sp>
+      <p:sp>
+        <p:nvSpPr>
+          <p:cNvPr id="11" name="Shape 9"/>
+          <p:cNvSpPr/>
+          <p:nvPr/>
+        </p:nvSpPr>
+        <p:spPr>
+          <a:xfrm>
+            <a:off x="1060704" y="2414016"/>
+            <a:ext cx="4413352" cy="7315"/>
+          </a:xfrm>
+          <a:prstGeom prst="rect">
             <a:avLst/>
           </a:prstGeom>
           <a:solidFill>
@@ -6527,53 +6672,157 @@
       </p:sp>
       <p:sp>
         <p:nvSpPr>
-          <p:cNvPr id="11" name="Text 9"/>
-          <p:cNvSpPr/>
-          <p:nvPr/>
-        </p:nvSpPr>
-        <p:spPr>
-          <a:xfrm>
-            <a:off x="969264" y="1993392"/>
-            <a:ext cx="329184" cy="329184"/>
-          </a:xfrm>
-          <a:prstGeom prst="rect">
-            <a:avLst/>
-          </a:prstGeom>
-          <a:noFill/>
-          <a:ln/>
-        </p:spPr>
-        <p:txBody>
-          <a:bodyPr wrap="square" lIns="0" tIns="0" rIns="0" bIns="0" rtlCol="0" anchor="ctr"/>
-          <a:lstStyle/>
-          <a:p>
-            <a:pPr algn="ctr" indent="0" marL="0">
-              <a:buNone/>
-            </a:pPr>
-            <a:r>
-              <a:rPr lang="en-US" sz="1100" b="1" dirty="0">
-                <a:solidFill>
-                  <a:srgbClr val="FFFFFF"/>
-                </a:solidFill>
-                <a:latin typeface="Pretendard" pitchFamily="34" charset="0"/>
-                <a:ea typeface="Pretendard" pitchFamily="34" charset="-122"/>
-                <a:cs typeface="Pretendard" pitchFamily="34" charset="-120"/>
-              </a:rPr>
-              <a:t>1</a:t>
-            </a:r>
-            <a:endParaRPr lang="en-US" sz="1100" dirty="0"/>
-          </a:p>
-        </p:txBody>
-      </p:sp>
-      <p:sp>
-        <p:nvSpPr>
           <p:cNvPr id="12" name="Text 10"/>
           <p:cNvSpPr/>
           <p:nvPr/>
         </p:nvSpPr>
         <p:spPr>
           <a:xfrm>
-            <a:off x="1426464" y="1810512"/>
-            <a:ext cx="5175504" cy="329184"/>
+            <a:off x="1060704" y="2523744"/>
+            <a:ext cx="4413352" cy="2706624"/>
+          </a:xfrm>
+          <a:prstGeom prst="rect">
+            <a:avLst/>
+          </a:prstGeom>
+          <a:noFill/>
+          <a:ln/>
+        </p:spPr>
+        <p:txBody>
+          <a:bodyPr wrap="square" lIns="0" tIns="0" rIns="0" bIns="0" rtlCol="0" anchor="t"/>
+          <a:lstStyle/>
+          <a:p>
+            <a:pPr marL="177800" indent="-177800">
+              <a:lnSpc>
+                <a:spcPct val="120000"/>
+              </a:lnSpc>
+              <a:spcAft>
+                <a:spcPts val="1100"/>
+              </a:spcAft>
+              <a:buSzPct val="100000"/>
+              <a:buChar char="•"/>
+            </a:pPr>
+            <a:r>
+              <a:rPr lang="en-US" sz="1200" dirty="0">
+                <a:solidFill>
+                  <a:srgbClr val="1F1F1F"/>
+                </a:solidFill>
+                <a:latin typeface="Pretendard" pitchFamily="34" charset="0"/>
+                <a:ea typeface="Pretendard" pitchFamily="34" charset="-122"/>
+                <a:cs typeface="Pretendard" pitchFamily="34" charset="-120"/>
+              </a:rPr>
+              <a:t>Rittel &amp; Webber (1973) 「Dilemmas in a General Theory of Planning」 — Policy Sciences 4(2), 155–169. 필수</a:t>
+            </a:r>
+            <a:endParaRPr lang="en-US" sz="1200" dirty="0"/>
+          </a:p>
+          <a:p>
+            <a:pPr marL="177800" indent="-177800">
+              <a:lnSpc>
+                <a:spcPct val="120000"/>
+              </a:lnSpc>
+              <a:spcAft>
+                <a:spcPts val="1100"/>
+              </a:spcAft>
+              <a:buSzPct val="100000"/>
+              <a:buChar char="•"/>
+            </a:pPr>
+            <a:r>
+              <a:rPr lang="en-US" sz="1200" dirty="0">
+                <a:solidFill>
+                  <a:srgbClr val="1F1F1F"/>
+                </a:solidFill>
+                <a:latin typeface="Pretendard" pitchFamily="34" charset="0"/>
+                <a:ea typeface="Pretendard" pitchFamily="34" charset="-122"/>
+                <a:cs typeface="Pretendard" pitchFamily="34" charset="-120"/>
+              </a:rPr>
+              <a:t>Buchanan (1992) 「Wicked Problems in Design Thinking」 — Design Issues 8(2), 5–21. 함께 읽습니다</a:t>
+            </a:r>
+            <a:endParaRPr lang="en-US" sz="1200" dirty="0"/>
+          </a:p>
+          <a:p>
+            <a:pPr marL="177800" indent="-177800">
+              <a:lnSpc>
+                <a:spcPct val="120000"/>
+              </a:lnSpc>
+              <a:spcAft>
+                <a:spcPts val="1100"/>
+              </a:spcAft>
+              <a:buSzPct val="100000"/>
+              <a:buChar char="•"/>
+            </a:pPr>
+            <a:r>
+              <a:rPr lang="en-US" sz="1200" dirty="0">
+                <a:solidFill>
+                  <a:srgbClr val="1F1F1F"/>
+                </a:solidFill>
+                <a:latin typeface="Pretendard" pitchFamily="34" charset="0"/>
+                <a:ea typeface="Pretendard" pitchFamily="34" charset="-122"/>
+                <a:cs typeface="Pretendard" pitchFamily="34" charset="-120"/>
+              </a:rPr>
+              <a:t>도서관 전자저널에서 받습니다. 접근이 안 되면 오늘 수업 끝나고 알려 주세요</a:t>
+            </a:r>
+            <a:endParaRPr lang="en-US" sz="1200" dirty="0"/>
+          </a:p>
+          <a:p>
+            <a:pPr marL="177800" indent="-177800">
+              <a:lnSpc>
+                <a:spcPct val="120000"/>
+              </a:lnSpc>
+              <a:spcAft>
+                <a:spcPts val="1100"/>
+              </a:spcAft>
+              <a:buSzPct val="100000"/>
+              <a:buChar char="•"/>
+            </a:pPr>
+            <a:r>
+              <a:rPr lang="en-US" sz="1200" dirty="0">
+                <a:solidFill>
+                  <a:srgbClr val="1F1F1F"/>
+                </a:solidFill>
+                <a:latin typeface="Pretendard" pitchFamily="34" charset="0"/>
+                <a:ea typeface="Pretendard" pitchFamily="34" charset="-122"/>
+                <a:cs typeface="Pretendard" pitchFamily="34" charset="-120"/>
+              </a:rPr>
+              <a:t>둘 다 어려우면 앞의 것만. 뒤의 것은 세션에서 함께 봅니다</a:t>
+            </a:r>
+            <a:endParaRPr lang="en-US" sz="1200" dirty="0"/>
+          </a:p>
+        </p:txBody>
+      </p:sp>
+      <p:sp>
+        <p:nvSpPr>
+          <p:cNvPr id="13" name="Shape 11"/>
+          <p:cNvSpPr/>
+          <p:nvPr/>
+        </p:nvSpPr>
+        <p:spPr>
+          <a:xfrm>
+            <a:off x="6297016" y="1664208"/>
+            <a:ext cx="5254600" cy="3749040"/>
+          </a:xfrm>
+          <a:prstGeom prst="rect">
+            <a:avLst/>
+          </a:prstGeom>
+          <a:solidFill>
+            <a:srgbClr val="F2F2F2"/>
+          </a:solidFill>
+          <a:ln w="12700">
+            <a:solidFill>
+              <a:srgbClr val="DCDCDC"/>
+            </a:solidFill>
+            <a:prstDash val="solid"/>
+          </a:ln>
+        </p:spPr>
+      </p:sp>
+      <p:sp>
+        <p:nvSpPr>
+          <p:cNvPr id="14" name="Text 12"/>
+          <p:cNvSpPr/>
+          <p:nvPr/>
+        </p:nvSpPr>
+        <p:spPr>
+          <a:xfrm>
+            <a:off x="6717640" y="1993392"/>
+            <a:ext cx="4413352" cy="365760"/>
           </a:xfrm>
           <a:prstGeom prst="rect">
             <a:avLst/>
@@ -6589,7 +6838,7 @@
               <a:buNone/>
             </a:pPr>
             <a:r>
-              <a:rPr lang="en-US" sz="1400" dirty="0">
+              <a:rPr lang="en-US" sz="1700" dirty="0">
                 <a:solidFill>
                   <a:srgbClr val="111111"/>
                 </a:solidFill>
@@ -6597,22 +6846,47 @@
                 <a:ea typeface="Pretendard SemiBold" pitchFamily="34" charset="-122"/>
                 <a:cs typeface="Pretendard SemiBold" pitchFamily="34" charset="-120"/>
               </a:rPr>
-              <a:t>리딩 노트 2회차</a:t>
-            </a:r>
-            <a:endParaRPr lang="en-US" sz="1400" dirty="0"/>
-          </a:p>
-        </p:txBody>
-      </p:sp>
-      <p:sp>
-        <p:nvSpPr>
-          <p:cNvPr id="13" name="Text 11"/>
-          <p:cNvSpPr/>
-          <p:nvPr/>
-        </p:nvSpPr>
-        <p:spPr>
-          <a:xfrm>
-            <a:off x="1426464" y="2121408"/>
-            <a:ext cx="5175504" cy="420624"/>
+              <a:t>쓸 것 — A4 한 장, 네 칸</a:t>
+            </a:r>
+            <a:endParaRPr lang="en-US" sz="1700" dirty="0"/>
+          </a:p>
+        </p:txBody>
+      </p:sp>
+      <p:sp>
+        <p:nvSpPr>
+          <p:cNvPr id="15" name="Shape 13"/>
+          <p:cNvSpPr/>
+          <p:nvPr/>
+        </p:nvSpPr>
+        <p:spPr>
+          <a:xfrm>
+            <a:off x="6717640" y="2414016"/>
+            <a:ext cx="4413352" cy="7315"/>
+          </a:xfrm>
+          <a:prstGeom prst="rect">
+            <a:avLst/>
+          </a:prstGeom>
+          <a:solidFill>
+            <a:srgbClr val="111111"/>
+          </a:solidFill>
+          <a:ln w="12700">
+            <a:solidFill>
+              <a:srgbClr val="111111"/>
+            </a:solidFill>
+            <a:prstDash val="solid"/>
+          </a:ln>
+        </p:spPr>
+      </p:sp>
+      <p:sp>
+        <p:nvSpPr>
+          <p:cNvPr id="16" name="Text 14"/>
+          <p:cNvSpPr/>
+          <p:nvPr/>
+        </p:nvSpPr>
+        <p:spPr>
+          <a:xfrm>
+            <a:off x="6717640" y="2523744"/>
+            <a:ext cx="4413352" cy="2706624"/>
           </a:xfrm>
           <a:prstGeom prst="rect">
             <a:avLst/>
@@ -6624,14 +6898,129 @@
           <a:bodyPr wrap="square" lIns="0" tIns="0" rIns="0" bIns="0" rtlCol="0" anchor="t"/>
           <a:lstStyle/>
           <a:p>
+            <a:pPr marL="177800" indent="-177800">
+              <a:lnSpc>
+                <a:spcPct val="120000"/>
+              </a:lnSpc>
+              <a:spcAft>
+                <a:spcPts val="1100"/>
+              </a:spcAft>
+              <a:buSzPct val="100000"/>
+              <a:buChar char="•"/>
+            </a:pPr>
+            <a:r>
+              <a:rPr lang="en-US" sz="1200" dirty="0">
+                <a:solidFill>
+                  <a:srgbClr val="1F1F1F"/>
+                </a:solidFill>
+                <a:latin typeface="Pretendard" pitchFamily="34" charset="0"/>
+                <a:ea typeface="Pretendard" pitchFamily="34" charset="-122"/>
+                <a:cs typeface="Pretendard" pitchFamily="34" charset="-120"/>
+              </a:rPr>
+              <a:t>저자가 무엇에 반대하고 있는가 — 한 문단</a:t>
+            </a:r>
+            <a:endParaRPr lang="en-US" sz="1200" dirty="0"/>
+          </a:p>
+          <a:p>
+            <a:pPr marL="177800" indent="-177800">
+              <a:lnSpc>
+                <a:spcPct val="120000"/>
+              </a:lnSpc>
+              <a:spcAft>
+                <a:spcPts val="1100"/>
+              </a:spcAft>
+              <a:buSzPct val="100000"/>
+              <a:buChar char="•"/>
+            </a:pPr>
+            <a:r>
+              <a:rPr lang="en-US" sz="1200" dirty="0">
+                <a:solidFill>
+                  <a:srgbClr val="1F1F1F"/>
+                </a:solidFill>
+                <a:latin typeface="Pretendard" pitchFamily="34" charset="0"/>
+                <a:ea typeface="Pretendard" pitchFamily="34" charset="-122"/>
+                <a:cs typeface="Pretendard" pitchFamily="34" charset="-120"/>
+              </a:rPr>
+              <a:t>내가 동의하지 않는 지점 — 한 문단</a:t>
+            </a:r>
+            <a:endParaRPr lang="en-US" sz="1200" dirty="0"/>
+          </a:p>
+          <a:p>
+            <a:pPr marL="177800" indent="-177800">
+              <a:lnSpc>
+                <a:spcPct val="120000"/>
+              </a:lnSpc>
+              <a:spcAft>
+                <a:spcPts val="1100"/>
+              </a:spcAft>
+              <a:buSzPct val="100000"/>
+              <a:buChar char="•"/>
+            </a:pPr>
+            <a:r>
+              <a:rPr lang="en-US" sz="1200" dirty="0">
+                <a:solidFill>
+                  <a:srgbClr val="1F1F1F"/>
+                </a:solidFill>
+                <a:latin typeface="Pretendard" pitchFamily="34" charset="0"/>
+                <a:ea typeface="Pretendard" pitchFamily="34" charset="-122"/>
+                <a:cs typeface="Pretendard" pitchFamily="34" charset="-120"/>
+              </a:rPr>
+              <a:t>이 텍스트가 내 연구에 요구하는 것 — 방법 · 개념 · 위치 중 어디인지</a:t>
+            </a:r>
+            <a:endParaRPr lang="en-US" sz="1200" dirty="0"/>
+          </a:p>
+          <a:p>
+            <a:pPr marL="177800" indent="-177800">
+              <a:lnSpc>
+                <a:spcPct val="120000"/>
+              </a:lnSpc>
+              <a:spcAft>
+                <a:spcPts val="1100"/>
+              </a:spcAft>
+              <a:buSzPct val="100000"/>
+              <a:buChar char="•"/>
+            </a:pPr>
+            <a:r>
+              <a:rPr lang="en-US" sz="1200" dirty="0">
+                <a:solidFill>
+                  <a:srgbClr val="1F1F1F"/>
+                </a:solidFill>
+                <a:latin typeface="Pretendard" pitchFamily="34" charset="0"/>
+                <a:ea typeface="Pretendard" pitchFamily="34" charset="-122"/>
+                <a:cs typeface="Pretendard" pitchFamily="34" charset="-120"/>
+              </a:rPr>
+              <a:t>세션에 가져올 질문 하나</a:t>
+            </a:r>
+            <a:endParaRPr lang="en-US" sz="1200" dirty="0"/>
+          </a:p>
+        </p:txBody>
+      </p:sp>
+      <p:sp>
+        <p:nvSpPr>
+          <p:cNvPr id="17" name="Text 15"/>
+          <p:cNvSpPr/>
+          <p:nvPr/>
+        </p:nvSpPr>
+        <p:spPr>
+          <a:xfrm>
+            <a:off x="640080" y="5541264"/>
+            <a:ext cx="10911535" cy="402336"/>
+          </a:xfrm>
+          <a:prstGeom prst="rect">
+            <a:avLst/>
+          </a:prstGeom>
+          <a:noFill/>
+          <a:ln/>
+        </p:spPr>
+        <p:txBody>
+          <a:bodyPr wrap="square" lIns="0" tIns="0" rIns="0" bIns="0" rtlCol="0" anchor="ctr"/>
+          <a:lstStyle/>
+          <a:p>
             <a:pPr indent="0" marL="0">
-              <a:lnSpc>
-                <a:spcPct val="122000"/>
-              </a:lnSpc>
-              <a:buNone/>
-            </a:pPr>
-            <a:r>
-              <a:rPr lang="en-US" sz="1100" dirty="0">
+              <a:buNone/>
+            </a:pPr>
+            <a:r>
+              <a:rPr lang="en-US" sz="1200" dirty="0">
                 <a:solidFill>
                   <a:srgbClr val="6E6E6E"/>
                 </a:solidFill>
@@ -6639,21 +7028,415 @@
                 <a:ea typeface="Pretendard" pitchFamily="34" charset="-122"/>
                 <a:cs typeface="Pretendard" pitchFamily="34" charset="-120"/>
               </a:rPr>
-              <a:t>Rittel &amp; Webber (1973) 에 대해 A4 1매. 이번에도 요약이 아니라 '이 텍스트가 내 연구에 무엇을 요구하는가' 입니다.</a:t>
-            </a:r>
-            <a:endParaRPr lang="en-US" sz="1100" dirty="0"/>
-          </a:p>
-        </p:txBody>
-      </p:sp>
-      <p:sp>
-        <p:nvSpPr>
-          <p:cNvPr id="14" name="Shape 12"/>
-          <p:cNvSpPr/>
-          <p:nvPr/>
-        </p:nvSpPr>
-        <p:spPr>
-          <a:xfrm>
-            <a:off x="640080" y="2743200"/>
+              <a:t>요약은 받지 않습니다. 제출은 공유 폴더에 · 파일 이름은 이름_리딩노트02.</a:t>
+            </a:r>
+            <a:endParaRPr lang="en-US" sz="1200" dirty="0"/>
+          </a:p>
+        </p:txBody>
+      </p:sp>
+      <p:sp>
+        <p:nvSpPr>
+          <p:cNvPr id="18" name="Shape 16"/>
+          <p:cNvSpPr/>
+          <p:nvPr/>
+        </p:nvSpPr>
+        <p:spPr>
+          <a:xfrm>
+            <a:off x="640080" y="6291072"/>
+            <a:ext cx="10911535" cy="7315"/>
+          </a:xfrm>
+          <a:prstGeom prst="rect">
+            <a:avLst/>
+          </a:prstGeom>
+          <a:solidFill>
+            <a:srgbClr val="DCDCDC"/>
+          </a:solidFill>
+          <a:ln w="12700">
+            <a:solidFill>
+              <a:srgbClr val="DCDCDC"/>
+            </a:solidFill>
+            <a:prstDash val="solid"/>
+          </a:ln>
+        </p:spPr>
+      </p:sp>
+      <p:sp>
+        <p:nvSpPr>
+          <p:cNvPr id="19" name="Text 17"/>
+          <p:cNvSpPr/>
+          <p:nvPr/>
+        </p:nvSpPr>
+        <p:spPr>
+          <a:xfrm>
+            <a:off x="640080" y="6382512"/>
+            <a:ext cx="7772400" cy="237744"/>
+          </a:xfrm>
+          <a:prstGeom prst="rect">
+            <a:avLst/>
+          </a:prstGeom>
+          <a:noFill/>
+          <a:ln/>
+        </p:spPr>
+        <p:txBody>
+          <a:bodyPr wrap="square" lIns="0" tIns="0" rIns="0" bIns="0" rtlCol="0" anchor="ctr"/>
+          <a:lstStyle/>
+          <a:p>
+            <a:pPr indent="0" marL="0">
+              <a:buNone/>
+            </a:pPr>
+            <a:r>
+              <a:rPr lang="en-US" sz="850" spc="40" kern="0" dirty="0">
+                <a:solidFill>
+                  <a:srgbClr val="9B9B9B"/>
+                </a:solidFill>
+                <a:latin typeface="Pretendard" pitchFamily="34" charset="0"/>
+                <a:ea typeface="Pretendard" pitchFamily="34" charset="-122"/>
+                <a:cs typeface="Pretendard" pitchFamily="34" charset="-120"/>
+              </a:rPr>
+              <a:t>컨셉트와 프로세스 · 2주차 디자인 프로세스의 계보</a:t>
+            </a:r>
+            <a:endParaRPr lang="en-US" sz="850" dirty="0"/>
+          </a:p>
+        </p:txBody>
+      </p:sp>
+      <p:sp>
+        <p:nvSpPr>
+          <p:cNvPr id="20" name="Text 18"/>
+          <p:cNvSpPr/>
+          <p:nvPr/>
+        </p:nvSpPr>
+        <p:spPr>
+          <a:xfrm>
+            <a:off x="10271455" y="6382512"/>
+            <a:ext cx="1280160" cy="237744"/>
+          </a:xfrm>
+          <a:prstGeom prst="rect">
+            <a:avLst/>
+          </a:prstGeom>
+          <a:noFill/>
+          <a:ln/>
+        </p:spPr>
+        <p:txBody>
+          <a:bodyPr wrap="square" lIns="0" tIns="0" rIns="0" bIns="0" rtlCol="0" anchor="ctr"/>
+          <a:lstStyle/>
+          <a:p>
+            <a:pPr algn="r" indent="0" marL="0">
+              <a:buNone/>
+            </a:pPr>
+            <a:r>
+              <a:rPr lang="en-US" sz="850" spc="140" kern="0" dirty="0">
+                <a:solidFill>
+                  <a:srgbClr val="9B9B9B"/>
+                </a:solidFill>
+                <a:latin typeface="Pretendard" pitchFamily="34" charset="0"/>
+                <a:ea typeface="Pretendard" pitchFamily="34" charset="-122"/>
+                <a:cs typeface="Pretendard" pitchFamily="34" charset="-120"/>
+              </a:rPr>
+              <a:t>P.09</a:t>
+            </a:r>
+            <a:endParaRPr lang="en-US" sz="850" dirty="0"/>
+          </a:p>
+        </p:txBody>
+      </p:sp>
+    </p:spTree>
+  </p:cSld>
+  <p:clrMapOvr>
+    <a:masterClrMapping/>
+  </p:clrMapOvr>
+</p:sld>
+</file>
+
+<file path=ppt/slides/slide14.xml><?xml version="1.0" encoding="utf-8"?>
+<p:sld xmlns:a="http://schemas.openxmlformats.org/drawingml/2006/main" xmlns:r="http://schemas.openxmlformats.org/officeDocument/2006/relationships" xmlns:p="http://schemas.openxmlformats.org/presentationml/2006/main">
+  <p:cSld name="Slide 14">
+    <p:bg>
+      <p:bgPr>
+        <a:solidFill>
+          <a:srgbClr val="FFFFFF"/>
+        </a:solidFill>
+      </p:bgPr>
+    </p:bg>
+    <p:spTree>
+      <p:nvGrpSpPr>
+        <p:cNvPr id="1" name=""/>
+        <p:cNvGrpSpPr/>
+        <p:nvPr/>
+      </p:nvGrpSpPr>
+      <p:grpSpPr>
+        <a:xfrm>
+          <a:off x="0" y="0"/>
+          <a:ext cx="0" cy="0"/>
+          <a:chOff x="0" y="0"/>
+          <a:chExt cx="0" cy="0"/>
+        </a:xfrm>
+      </p:grpSpPr>
+      <p:sp>
+        <p:nvSpPr>
+          <p:cNvPr id="2" name="Text 0"/>
+          <p:cNvSpPr/>
+          <p:nvPr/>
+        </p:nvSpPr>
+        <p:spPr>
+          <a:xfrm>
+            <a:off x="640080" y="274320"/>
+            <a:ext cx="3657600" cy="219456"/>
+          </a:xfrm>
+          <a:prstGeom prst="rect">
+            <a:avLst/>
+          </a:prstGeom>
+          <a:noFill/>
+          <a:ln/>
+        </p:spPr>
+        <p:txBody>
+          <a:bodyPr wrap="square" lIns="0" tIns="0" rIns="0" bIns="0" rtlCol="0" anchor="ctr"/>
+          <a:lstStyle/>
+          <a:p>
+            <a:pPr indent="0" marL="0">
+              <a:buNone/>
+            </a:pPr>
+            <a:r>
+              <a:rPr lang="en-US" sz="900" spc="120" kern="0" dirty="0">
+                <a:solidFill>
+                  <a:srgbClr val="8A8A8A"/>
+                </a:solidFill>
+                <a:latin typeface="Pretendard" pitchFamily="34" charset="0"/>
+                <a:ea typeface="Pretendard" pitchFamily="34" charset="-122"/>
+                <a:cs typeface="Pretendard" pitchFamily="34" charset="-120"/>
+              </a:rPr>
+              <a:t>컨셉트와 프로세스</a:t>
+            </a:r>
+            <a:endParaRPr lang="en-US" sz="900" dirty="0"/>
+          </a:p>
+        </p:txBody>
+      </p:sp>
+      <p:sp>
+        <p:nvSpPr>
+          <p:cNvPr id="3" name="Text 1"/>
+          <p:cNvSpPr/>
+          <p:nvPr/>
+        </p:nvSpPr>
+        <p:spPr>
+          <a:xfrm>
+            <a:off x="4480560" y="274320"/>
+            <a:ext cx="4572000" cy="219456"/>
+          </a:xfrm>
+          <a:prstGeom prst="rect">
+            <a:avLst/>
+          </a:prstGeom>
+          <a:noFill/>
+          <a:ln/>
+        </p:spPr>
+        <p:txBody>
+          <a:bodyPr wrap="square" lIns="0" tIns="0" rIns="0" bIns="0" rtlCol="0" anchor="ctr"/>
+          <a:lstStyle/>
+          <a:p>
+            <a:pPr algn="ctr" indent="0" marL="0">
+              <a:buNone/>
+            </a:pPr>
+            <a:r>
+              <a:rPr lang="en-US" sz="900" spc="120" kern="0" dirty="0">
+                <a:solidFill>
+                  <a:srgbClr val="8A8A8A"/>
+                </a:solidFill>
+                <a:latin typeface="Pretendard" pitchFamily="34" charset="0"/>
+                <a:ea typeface="Pretendard" pitchFamily="34" charset="-122"/>
+                <a:cs typeface="Pretendard" pitchFamily="34" charset="-120"/>
+              </a:rPr>
+              <a:t>PHASE 1 계보</a:t>
+            </a:r>
+            <a:endParaRPr lang="en-US" sz="900" dirty="0"/>
+          </a:p>
+        </p:txBody>
+      </p:sp>
+      <p:sp>
+        <p:nvSpPr>
+          <p:cNvPr id="4" name="Text 2"/>
+          <p:cNvSpPr/>
+          <p:nvPr/>
+        </p:nvSpPr>
+        <p:spPr>
+          <a:xfrm>
+            <a:off x="8808415" y="274320"/>
+            <a:ext cx="2743200" cy="219456"/>
+          </a:xfrm>
+          <a:prstGeom prst="rect">
+            <a:avLst/>
+          </a:prstGeom>
+          <a:noFill/>
+          <a:ln/>
+        </p:spPr>
+        <p:txBody>
+          <a:bodyPr wrap="square" lIns="0" tIns="0" rIns="0" bIns="0" rtlCol="0" anchor="ctr"/>
+          <a:lstStyle/>
+          <a:p>
+            <a:pPr algn="r" indent="0" marL="0">
+              <a:buNone/>
+            </a:pPr>
+            <a:r>
+              <a:rPr lang="en-US" sz="900" spc="200" kern="0" dirty="0">
+                <a:solidFill>
+                  <a:srgbClr val="8A8A8A"/>
+                </a:solidFill>
+                <a:latin typeface="Pretendard" pitchFamily="34" charset="0"/>
+                <a:ea typeface="Pretendard" pitchFamily="34" charset="-122"/>
+                <a:cs typeface="Pretendard" pitchFamily="34" charset="-120"/>
+              </a:rPr>
+              <a:t>WEEK 02</a:t>
+            </a:r>
+            <a:endParaRPr lang="en-US" sz="900" dirty="0"/>
+          </a:p>
+        </p:txBody>
+      </p:sp>
+      <p:sp>
+        <p:nvSpPr>
+          <p:cNvPr id="5" name="Shape 3"/>
+          <p:cNvSpPr/>
+          <p:nvPr/>
+        </p:nvSpPr>
+        <p:spPr>
+          <a:xfrm>
+            <a:off x="640080" y="548640"/>
+            <a:ext cx="10911535" cy="7315"/>
+          </a:xfrm>
+          <a:prstGeom prst="rect">
+            <a:avLst/>
+          </a:prstGeom>
+          <a:solidFill>
+            <a:srgbClr val="DCDCDC"/>
+          </a:solidFill>
+          <a:ln w="12700">
+            <a:solidFill>
+              <a:srgbClr val="DCDCDC"/>
+            </a:solidFill>
+            <a:prstDash val="solid"/>
+          </a:ln>
+        </p:spPr>
+      </p:sp>
+      <p:sp>
+        <p:nvSpPr>
+          <p:cNvPr id="6" name="Text 4"/>
+          <p:cNvSpPr/>
+          <p:nvPr/>
+        </p:nvSpPr>
+        <p:spPr>
+          <a:xfrm>
+            <a:off x="640080" y="640080"/>
+            <a:ext cx="10911535" cy="219456"/>
+          </a:xfrm>
+          <a:prstGeom prst="rect">
+            <a:avLst/>
+          </a:prstGeom>
+          <a:noFill/>
+          <a:ln/>
+        </p:spPr>
+        <p:txBody>
+          <a:bodyPr wrap="square" lIns="0" tIns="0" rIns="0" bIns="0" rtlCol="0" anchor="ctr"/>
+          <a:lstStyle/>
+          <a:p>
+            <a:pPr indent="0" marL="0">
+              <a:buNone/>
+            </a:pPr>
+            <a:r>
+              <a:rPr lang="en-US" sz="950" spc="260" kern="0" dirty="0">
+                <a:solidFill>
+                  <a:srgbClr val="8A8A8A"/>
+                </a:solidFill>
+                <a:latin typeface="Pretendard" pitchFamily="34" charset="0"/>
+                <a:ea typeface="Pretendard" pitchFamily="34" charset="-122"/>
+                <a:cs typeface="Pretendard" pitchFamily="34" charset="-120"/>
+              </a:rPr>
+              <a:t>HOMEWORK</a:t>
+            </a:r>
+            <a:endParaRPr lang="en-US" sz="950" dirty="0"/>
+          </a:p>
+        </p:txBody>
+      </p:sp>
+      <p:sp>
+        <p:nvSpPr>
+          <p:cNvPr id="7" name="Text 5"/>
+          <p:cNvSpPr/>
+          <p:nvPr/>
+        </p:nvSpPr>
+        <p:spPr>
+          <a:xfrm>
+            <a:off x="640080" y="859536"/>
+            <a:ext cx="10911535" cy="475488"/>
+          </a:xfrm>
+          <a:prstGeom prst="rect">
+            <a:avLst/>
+          </a:prstGeom>
+          <a:noFill/>
+          <a:ln/>
+        </p:spPr>
+        <p:txBody>
+          <a:bodyPr wrap="square" lIns="0" tIns="0" rIns="0" bIns="0" rtlCol="0" anchor="ctr"/>
+          <a:lstStyle/>
+          <a:p>
+            <a:pPr indent="0" marL="0">
+              <a:buNone/>
+            </a:pPr>
+            <a:r>
+              <a:rPr lang="en-US" sz="3000" dirty="0">
+                <a:solidFill>
+                  <a:srgbClr val="111111"/>
+                </a:solidFill>
+                <a:latin typeface="Pretendard SemiBold" pitchFamily="34" charset="0"/>
+                <a:ea typeface="Pretendard SemiBold" pitchFamily="34" charset="-122"/>
+                <a:cs typeface="Pretendard SemiBold" pitchFamily="34" charset="-120"/>
+              </a:rPr>
+              <a:t>과제와 다음 주</a:t>
+            </a:r>
+            <a:endParaRPr lang="en-US" sz="3000" dirty="0"/>
+          </a:p>
+        </p:txBody>
+      </p:sp>
+      <p:sp>
+        <p:nvSpPr>
+          <p:cNvPr id="8" name="Text 6"/>
+          <p:cNvSpPr/>
+          <p:nvPr/>
+        </p:nvSpPr>
+        <p:spPr>
+          <a:xfrm>
+            <a:off x="640080" y="1371600"/>
+            <a:ext cx="10911535" cy="219456"/>
+          </a:xfrm>
+          <a:prstGeom prst="rect">
+            <a:avLst/>
+          </a:prstGeom>
+          <a:noFill/>
+          <a:ln/>
+        </p:spPr>
+        <p:txBody>
+          <a:bodyPr wrap="square" lIns="0" tIns="0" rIns="0" bIns="0" rtlCol="0" anchor="ctr"/>
+          <a:lstStyle/>
+          <a:p>
+            <a:pPr indent="0" marL="0">
+              <a:buNone/>
+            </a:pPr>
+            <a:r>
+              <a:rPr lang="en-US" sz="1150" dirty="0">
+                <a:solidFill>
+                  <a:srgbClr val="6E6E6E"/>
+                </a:solidFill>
+                <a:latin typeface="Pretendard" pitchFamily="34" charset="0"/>
+                <a:ea typeface="Pretendard" pitchFamily="34" charset="-122"/>
+                <a:cs typeface="Pretendard" pitchFamily="34" charset="-120"/>
+              </a:rPr>
+              <a:t>3회차는 Wicked Problems 를 읽습니다.</a:t>
+            </a:r>
+            <a:endParaRPr lang="en-US" sz="1150" dirty="0"/>
+          </a:p>
+        </p:txBody>
+      </p:sp>
+      <p:sp>
+        <p:nvSpPr>
+          <p:cNvPr id="9" name="Shape 7"/>
+          <p:cNvSpPr/>
+          <p:nvPr/>
+        </p:nvSpPr>
+        <p:spPr>
+          <a:xfrm>
+            <a:off x="640080" y="1719072"/>
             <a:ext cx="6309360" cy="896112"/>
           </a:xfrm>
           <a:prstGeom prst="rect">
@@ -6672,13 +7455,13 @@
       </p:sp>
       <p:sp>
         <p:nvSpPr>
-          <p:cNvPr id="15" name="Shape 13"/>
-          <p:cNvSpPr/>
-          <p:nvPr/>
-        </p:nvSpPr>
-        <p:spPr>
-          <a:xfrm>
-            <a:off x="969264" y="3017520"/>
+          <p:cNvPr id="10" name="Shape 8"/>
+          <p:cNvSpPr/>
+          <p:nvPr/>
+        </p:nvSpPr>
+        <p:spPr>
+          <a:xfrm>
+            <a:off x="969264" y="1993392"/>
             <a:ext cx="329184" cy="329184"/>
           </a:xfrm>
           <a:prstGeom prst="ellipse">
@@ -6697,13 +7480,13 @@
       </p:sp>
       <p:sp>
         <p:nvSpPr>
-          <p:cNvPr id="16" name="Text 14"/>
-          <p:cNvSpPr/>
-          <p:nvPr/>
-        </p:nvSpPr>
-        <p:spPr>
-          <a:xfrm>
-            <a:off x="969264" y="3017520"/>
+          <p:cNvPr id="11" name="Text 9"/>
+          <p:cNvSpPr/>
+          <p:nvPr/>
+        </p:nvSpPr>
+        <p:spPr>
+          <a:xfrm>
+            <a:off x="969264" y="1993392"/>
             <a:ext cx="329184" cy="329184"/>
           </a:xfrm>
           <a:prstGeom prst="rect">
@@ -6728,7 +7511,7 @@
                 <a:ea typeface="Pretendard" pitchFamily="34" charset="-122"/>
                 <a:cs typeface="Pretendard" pitchFamily="34" charset="-120"/>
               </a:rPr>
-              <a:t>2</a:t>
+              <a:t>1</a:t>
             </a:r>
             <a:endParaRPr lang="en-US" sz="1100" dirty="0"/>
           </a:p>
@@ -6736,13 +7519,13 @@
       </p:sp>
       <p:sp>
         <p:nvSpPr>
-          <p:cNvPr id="17" name="Text 15"/>
-          <p:cNvSpPr/>
-          <p:nvPr/>
-        </p:nvSpPr>
-        <p:spPr>
-          <a:xfrm>
-            <a:off x="1426464" y="2834640"/>
+          <p:cNvPr id="12" name="Text 10"/>
+          <p:cNvSpPr/>
+          <p:nvPr/>
+        </p:nvSpPr>
+        <p:spPr>
+          <a:xfrm>
+            <a:off x="1426464" y="1810512"/>
             <a:ext cx="5175504" cy="329184"/>
           </a:xfrm>
           <a:prstGeom prst="rect">
@@ -6767,7 +7550,7 @@
                 <a:ea typeface="Pretendard SemiBold" pitchFamily="34" charset="-122"/>
                 <a:cs typeface="Pretendard SemiBold" pitchFamily="34" charset="-120"/>
               </a:rPr>
-              <a:t>계보도 개인본</a:t>
+              <a:t>리딩 노트 2회차</a:t>
             </a:r>
             <a:endParaRPr lang="en-US" sz="1400" dirty="0"/>
           </a:p>
@@ -6775,13 +7558,13 @@
       </p:sp>
       <p:sp>
         <p:nvSpPr>
-          <p:cNvPr id="18" name="Text 16"/>
-          <p:cNvSpPr/>
-          <p:nvPr/>
-        </p:nvSpPr>
-        <p:spPr>
-          <a:xfrm>
-            <a:off x="1426464" y="3145536"/>
+          <p:cNvPr id="13" name="Text 11"/>
+          <p:cNvSpPr/>
+          <p:nvPr/>
+        </p:nvSpPr>
+        <p:spPr>
+          <a:xfrm>
+            <a:off x="1426464" y="2121408"/>
             <a:ext cx="5175504" cy="420624"/>
           </a:xfrm>
           <a:prstGeom prst="rect">
@@ -6809,7 +7592,7 @@
                 <a:ea typeface="Pretendard" pitchFamily="34" charset="-122"/>
                 <a:cs typeface="Pretendard" pitchFamily="34" charset="-120"/>
               </a:rPr>
-              <a:t>오늘 함께 그린 계보도 위에 자기 연구가 어디에 서 있는지 표시해 옵니다. 선 하나와 이유 한 줄이면 됩니다.</a:t>
+              <a:t>Rittel &amp; Webber (1973) 필수, Buchanan (1992) 함께. A4 1매에 네 칸을 채웁니다. 공유 폴더에 올리고 파일 이름은 이름_리딩노트02.</a:t>
             </a:r>
             <a:endParaRPr lang="en-US" sz="1100" dirty="0"/>
           </a:p>
@@ -6817,13 +7600,13 @@
       </p:sp>
       <p:sp>
         <p:nvSpPr>
-          <p:cNvPr id="19" name="Shape 17"/>
-          <p:cNvSpPr/>
-          <p:nvPr/>
-        </p:nvSpPr>
-        <p:spPr>
-          <a:xfrm>
-            <a:off x="640080" y="3767328"/>
+          <p:cNvPr id="14" name="Shape 12"/>
+          <p:cNvSpPr/>
+          <p:nvPr/>
+        </p:nvSpPr>
+        <p:spPr>
+          <a:xfrm>
+            <a:off x="640080" y="2743200"/>
             <a:ext cx="6309360" cy="896112"/>
           </a:xfrm>
           <a:prstGeom prst="rect">
@@ -6842,13 +7625,13 @@
       </p:sp>
       <p:sp>
         <p:nvSpPr>
-          <p:cNvPr id="20" name="Shape 18"/>
-          <p:cNvSpPr/>
-          <p:nvPr/>
-        </p:nvSpPr>
-        <p:spPr>
-          <a:xfrm>
-            <a:off x="969264" y="4041648"/>
+          <p:cNvPr id="15" name="Shape 13"/>
+          <p:cNvSpPr/>
+          <p:nvPr/>
+        </p:nvSpPr>
+        <p:spPr>
+          <a:xfrm>
+            <a:off x="969264" y="3017520"/>
             <a:ext cx="329184" cy="329184"/>
           </a:xfrm>
           <a:prstGeom prst="ellipse">
@@ -6867,13 +7650,13 @@
       </p:sp>
       <p:sp>
         <p:nvSpPr>
-          <p:cNvPr id="21" name="Text 19"/>
-          <p:cNvSpPr/>
-          <p:nvPr/>
-        </p:nvSpPr>
-        <p:spPr>
-          <a:xfrm>
-            <a:off x="969264" y="4041648"/>
+          <p:cNvPr id="16" name="Text 14"/>
+          <p:cNvSpPr/>
+          <p:nvPr/>
+        </p:nvSpPr>
+        <p:spPr>
+          <a:xfrm>
+            <a:off x="969264" y="3017520"/>
             <a:ext cx="329184" cy="329184"/>
           </a:xfrm>
           <a:prstGeom prst="rect">
@@ -6898,7 +7681,7 @@
                 <a:ea typeface="Pretendard" pitchFamily="34" charset="-122"/>
                 <a:cs typeface="Pretendard" pitchFamily="34" charset="-120"/>
               </a:rPr>
-              <a:t>3</a:t>
+              <a:t>2</a:t>
             </a:r>
             <a:endParaRPr lang="en-US" sz="1100" dirty="0"/>
           </a:p>
@@ -6906,13 +7689,13 @@
       </p:sp>
       <p:sp>
         <p:nvSpPr>
-          <p:cNvPr id="22" name="Text 20"/>
-          <p:cNvSpPr/>
-          <p:nvPr/>
-        </p:nvSpPr>
-        <p:spPr>
-          <a:xfrm>
-            <a:off x="1426464" y="3858768"/>
+          <p:cNvPr id="17" name="Text 15"/>
+          <p:cNvSpPr/>
+          <p:nvPr/>
+        </p:nvSpPr>
+        <p:spPr>
+          <a:xfrm>
+            <a:off x="1426464" y="2834640"/>
             <a:ext cx="5175504" cy="329184"/>
           </a:xfrm>
           <a:prstGeom prst="rect">
@@ -6937,7 +7720,7 @@
                 <a:ea typeface="Pretendard SemiBold" pitchFamily="34" charset="-122"/>
                 <a:cs typeface="Pretendard SemiBold" pitchFamily="34" charset="-120"/>
               </a:rPr>
-              <a:t>발제자 — 발제문 공유</a:t>
+              <a:t>계보도 개인본</a:t>
             </a:r>
             <a:endParaRPr lang="en-US" sz="1400" dirty="0"/>
           </a:p>
@@ -6945,13 +7728,13 @@
       </p:sp>
       <p:sp>
         <p:nvSpPr>
-          <p:cNvPr id="23" name="Text 21"/>
-          <p:cNvSpPr/>
-          <p:nvPr/>
-        </p:nvSpPr>
-        <p:spPr>
-          <a:xfrm>
-            <a:off x="1426464" y="4169664"/>
+          <p:cNvPr id="18" name="Text 16"/>
+          <p:cNvSpPr/>
+          <p:nvPr/>
+        </p:nvSpPr>
+        <p:spPr>
+          <a:xfrm>
+            <a:off x="1426464" y="3145536"/>
             <a:ext cx="5175504" cy="420624"/>
           </a:xfrm>
           <a:prstGeom prst="rect">
@@ -6979,7 +7762,7 @@
                 <a:ea typeface="Pretendard" pitchFamily="34" charset="-122"/>
                 <a:cs typeface="Pretendard" pitchFamily="34" charset="-120"/>
               </a:rPr>
-              <a:t>3회차 발제자는 세션 48시간 전까지 A4 3매 내외로 공유합니다. 논점 추출 · 비판적 재구성 · 내 연구로 가져오기 세 부분입니다.</a:t>
+              <a:t>오늘 판을 내려받아 자기 연구 자리에 점을 찍고 이유를 한 줄 씁니다. 이미지나 PDF 한 장이면 됩니다.</a:t>
             </a:r>
             <a:endParaRPr lang="en-US" sz="1100" dirty="0"/>
           </a:p>
@@ -6987,16 +7770,41 @@
       </p:sp>
       <p:sp>
         <p:nvSpPr>
-          <p:cNvPr id="24" name="Shape 22"/>
-          <p:cNvSpPr/>
-          <p:nvPr/>
-        </p:nvSpPr>
-        <p:spPr>
-          <a:xfrm>
-            <a:off x="640080" y="4809744"/>
-            <a:ext cx="6309360" cy="7315"/>
-          </a:xfrm>
-          <a:prstGeom prst="rect">
+          <p:cNvPr id="19" name="Shape 17"/>
+          <p:cNvSpPr/>
+          <p:nvPr/>
+        </p:nvSpPr>
+        <p:spPr>
+          <a:xfrm>
+            <a:off x="640080" y="3767328"/>
+            <a:ext cx="6309360" cy="896112"/>
+          </a:xfrm>
+          <a:prstGeom prst="rect">
+            <a:avLst/>
+          </a:prstGeom>
+          <a:solidFill>
+            <a:srgbClr val="FFFFFF"/>
+          </a:solidFill>
+          <a:ln w="12700">
+            <a:solidFill>
+              <a:srgbClr val="DCDCDC"/>
+            </a:solidFill>
+            <a:prstDash val="solid"/>
+          </a:ln>
+        </p:spPr>
+      </p:sp>
+      <p:sp>
+        <p:nvSpPr>
+          <p:cNvPr id="20" name="Shape 18"/>
+          <p:cNvSpPr/>
+          <p:nvPr/>
+        </p:nvSpPr>
+        <p:spPr>
+          <a:xfrm>
+            <a:off x="969264" y="4041648"/>
+            <a:ext cx="329184" cy="329184"/>
+          </a:xfrm>
+          <a:prstGeom prst="ellipse">
             <a:avLst/>
           </a:prstGeom>
           <a:solidFill>
@@ -7012,14 +7820,53 @@
       </p:sp>
       <p:sp>
         <p:nvSpPr>
-          <p:cNvPr id="25" name="Text 23"/>
-          <p:cNvSpPr/>
-          <p:nvPr/>
-        </p:nvSpPr>
-        <p:spPr>
-          <a:xfrm>
-            <a:off x="640080" y="4901184"/>
-            <a:ext cx="6309360" cy="329184"/>
+          <p:cNvPr id="21" name="Text 19"/>
+          <p:cNvSpPr/>
+          <p:nvPr/>
+        </p:nvSpPr>
+        <p:spPr>
+          <a:xfrm>
+            <a:off x="969264" y="4041648"/>
+            <a:ext cx="329184" cy="329184"/>
+          </a:xfrm>
+          <a:prstGeom prst="rect">
+            <a:avLst/>
+          </a:prstGeom>
+          <a:noFill/>
+          <a:ln/>
+        </p:spPr>
+        <p:txBody>
+          <a:bodyPr wrap="square" lIns="0" tIns="0" rIns="0" bIns="0" rtlCol="0" anchor="ctr"/>
+          <a:lstStyle/>
+          <a:p>
+            <a:pPr algn="ctr" indent="0" marL="0">
+              <a:buNone/>
+            </a:pPr>
+            <a:r>
+              <a:rPr lang="en-US" sz="1100" b="1" dirty="0">
+                <a:solidFill>
+                  <a:srgbClr val="FFFFFF"/>
+                </a:solidFill>
+                <a:latin typeface="Pretendard" pitchFamily="34" charset="0"/>
+                <a:ea typeface="Pretendard" pitchFamily="34" charset="-122"/>
+                <a:cs typeface="Pretendard" pitchFamily="34" charset="-120"/>
+              </a:rPr>
+              <a:t>3</a:t>
+            </a:r>
+            <a:endParaRPr lang="en-US" sz="1100" dirty="0"/>
+          </a:p>
+        </p:txBody>
+      </p:sp>
+      <p:sp>
+        <p:nvSpPr>
+          <p:cNvPr id="22" name="Text 20"/>
+          <p:cNvSpPr/>
+          <p:nvPr/>
+        </p:nvSpPr>
+        <p:spPr>
+          <a:xfrm>
+            <a:off x="1426464" y="3858768"/>
+            <a:ext cx="5175504" cy="329184"/>
           </a:xfrm>
           <a:prstGeom prst="rect">
             <a:avLst/>
@@ -7035,30 +7882,72 @@
               <a:buNone/>
             </a:pPr>
             <a:r>
-              <a:rPr lang="en-US" sz="1200" b="1" dirty="0">
+              <a:rPr lang="en-US" sz="1400" dirty="0">
                 <a:solidFill>
                   <a:srgbClr val="111111"/>
                 </a:solidFill>
-                <a:latin typeface="Pretendard" pitchFamily="34" charset="0"/>
-                <a:ea typeface="Pretendard" pitchFamily="34" charset="-122"/>
-                <a:cs typeface="Pretendard" pitchFamily="34" charset="-120"/>
-              </a:rPr>
-              <a:t>제출 — 3회차 세션 48시간 전 · 발제자는 발제문 공유</a:t>
-            </a:r>
-            <a:endParaRPr lang="en-US" sz="1200" dirty="0"/>
-          </a:p>
-        </p:txBody>
-      </p:sp>
-      <p:sp>
-        <p:nvSpPr>
-          <p:cNvPr id="26" name="Shape 24"/>
-          <p:cNvSpPr/>
-          <p:nvPr/>
-        </p:nvSpPr>
-        <p:spPr>
-          <a:xfrm>
-            <a:off x="7351776" y="1719072"/>
-            <a:ext cx="4199839" cy="3803904"/>
+                <a:latin typeface="Pretendard SemiBold" pitchFamily="34" charset="0"/>
+                <a:ea typeface="Pretendard SemiBold" pitchFamily="34" charset="-122"/>
+                <a:cs typeface="Pretendard SemiBold" pitchFamily="34" charset="-120"/>
+              </a:rPr>
+              <a:t>3회차 발제자 — 발제문</a:t>
+            </a:r>
+            <a:endParaRPr lang="en-US" sz="1400" dirty="0"/>
+          </a:p>
+        </p:txBody>
+      </p:sp>
+      <p:sp>
+        <p:nvSpPr>
+          <p:cNvPr id="23" name="Text 21"/>
+          <p:cNvSpPr/>
+          <p:nvPr/>
+        </p:nvSpPr>
+        <p:spPr>
+          <a:xfrm>
+            <a:off x="1426464" y="4169664"/>
+            <a:ext cx="5175504" cy="420624"/>
+          </a:xfrm>
+          <a:prstGeom prst="rect">
+            <a:avLst/>
+          </a:prstGeom>
+          <a:noFill/>
+          <a:ln/>
+        </p:spPr>
+        <p:txBody>
+          <a:bodyPr wrap="square" lIns="0" tIns="0" rIns="0" bIns="0" rtlCol="0" anchor="t"/>
+          <a:lstStyle/>
+          <a:p>
+            <a:pPr indent="0" marL="0">
+              <a:lnSpc>
+                <a:spcPct val="122000"/>
+              </a:lnSpc>
+              <a:buNone/>
+            </a:pPr>
+            <a:r>
+              <a:rPr lang="en-US" sz="1100" dirty="0">
+                <a:solidFill>
+                  <a:srgbClr val="6E6E6E"/>
+                </a:solidFill>
+                <a:latin typeface="Pretendard" pitchFamily="34" charset="0"/>
+                <a:ea typeface="Pretendard" pitchFamily="34" charset="-122"/>
+                <a:cs typeface="Pretendard" pitchFamily="34" charset="-120"/>
+              </a:rPr>
+              <a:t>A4 3매 내외. 논점 추출 · 비판적 재구성 · 내 연구로 가져오기 세 부분. 세션 48시간 전까지 공유 폴더에 올립니다.</a:t>
+            </a:r>
+            <a:endParaRPr lang="en-US" sz="1100" dirty="0"/>
+          </a:p>
+        </p:txBody>
+      </p:sp>
+      <p:sp>
+        <p:nvSpPr>
+          <p:cNvPr id="24" name="Shape 22"/>
+          <p:cNvSpPr/>
+          <p:nvPr/>
+        </p:nvSpPr>
+        <p:spPr>
+          <a:xfrm>
+            <a:off x="640080" y="4809744"/>
+            <a:ext cx="6309360" cy="7315"/>
           </a:xfrm>
           <a:prstGeom prst="rect">
             <a:avLst/>
@@ -7076,6 +7965,70 @@
       </p:sp>
       <p:sp>
         <p:nvSpPr>
+          <p:cNvPr id="25" name="Text 23"/>
+          <p:cNvSpPr/>
+          <p:nvPr/>
+        </p:nvSpPr>
+        <p:spPr>
+          <a:xfrm>
+            <a:off x="640080" y="4901184"/>
+            <a:ext cx="6309360" cy="329184"/>
+          </a:xfrm>
+          <a:prstGeom prst="rect">
+            <a:avLst/>
+          </a:prstGeom>
+          <a:noFill/>
+          <a:ln/>
+        </p:spPr>
+        <p:txBody>
+          <a:bodyPr wrap="square" lIns="0" tIns="0" rIns="0" bIns="0" rtlCol="0" anchor="ctr"/>
+          <a:lstStyle/>
+          <a:p>
+            <a:pPr indent="0" marL="0">
+              <a:buNone/>
+            </a:pPr>
+            <a:r>
+              <a:rPr lang="en-US" sz="1200" b="1" dirty="0">
+                <a:solidFill>
+                  <a:srgbClr val="111111"/>
+                </a:solidFill>
+                <a:latin typeface="Pretendard" pitchFamily="34" charset="0"/>
+                <a:ea typeface="Pretendard" pitchFamily="34" charset="-122"/>
+                <a:cs typeface="Pretendard" pitchFamily="34" charset="-120"/>
+              </a:rPr>
+              <a:t>제출 — 3회차 세션 전까지 · 공유 폴더 업로드 (발제문은 48시간 전)</a:t>
+            </a:r>
+            <a:endParaRPr lang="en-US" sz="1200" dirty="0"/>
+          </a:p>
+        </p:txBody>
+      </p:sp>
+      <p:sp>
+        <p:nvSpPr>
+          <p:cNvPr id="26" name="Shape 24"/>
+          <p:cNvSpPr/>
+          <p:nvPr/>
+        </p:nvSpPr>
+        <p:spPr>
+          <a:xfrm>
+            <a:off x="7351776" y="1719072"/>
+            <a:ext cx="4199839" cy="3803904"/>
+          </a:xfrm>
+          <a:prstGeom prst="rect">
+            <a:avLst/>
+          </a:prstGeom>
+          <a:solidFill>
+            <a:srgbClr val="111111"/>
+          </a:solidFill>
+          <a:ln w="12700">
+            <a:solidFill>
+              <a:srgbClr val="111111"/>
+            </a:solidFill>
+            <a:prstDash val="solid"/>
+          </a:ln>
+        </p:spPr>
+      </p:sp>
+      <p:sp>
+        <p:nvSpPr>
           <p:cNvPr id="27" name="Text 25"/>
           <p:cNvSpPr/>
           <p:nvPr/>
@@ -7540,7 +8493,7 @@
                 <a:ea typeface="Pretendard" pitchFamily="34" charset="-122"/>
                 <a:cs typeface="Pretendard" pitchFamily="34" charset="-120"/>
               </a:rPr>
-              <a:t>P.09</a:t>
+              <a:t>P.10</a:t>
             </a:r>
             <a:endParaRPr lang="en-US" sz="850" dirty="0"/>
           </a:p>
